--- a/light-refract/files/R3-refraction.pptx
+++ b/light-refract/files/R3-refraction.pptx
@@ -8104,7 +8104,7 @@
         </p:nvPicPr>
         <p:blipFill>
           <a:blip r:embed="rId3"/>
-          <a:srcRect t="1048" b="1048"/>
+          <a:srcRect t="1164" b="1164"/>
           <a:stretch>
             <a:fillRect/>
           </a:stretch>
@@ -8326,7 +8326,7 @@
                 <a:ea typeface="微軟正黑體"/>
                 <a:cs typeface="微軟正黑體"/>
               </a:rPr>
-              <a:t>圈出看起來的樣子</a:t>
+              <a:t>看照片，在 ☐ 打勾</a:t>
             </a:r>
           </a:p>
         </p:txBody>
@@ -8456,7 +8456,7 @@
                 <a:ea typeface="微軟正黑體"/>
                 <a:cs typeface="微軟正黑體"/>
               </a:rPr>
-              <a:t>寫出「光在水面折一下」</a:t>
+              <a:t>勾答案，再勾「因為」</a:t>
             </a:r>
           </a:p>
         </p:txBody>
